--- a/sessions/s03_how_the_tree_picks_its_questions/teaching/slides/slides.pptx
+++ b/sessions/s03_how_the_tree_picks_its_questions/teaching/slides/slides.pptx
@@ -1731,7 +1731,7 @@
               <a:rPr>
                 <a:latin typeface="Vazirmatn"/>
               </a:rPr>
-              <a:t>First judge run is all-red — that's normal.</a:t>
+              <a:t>Judge is instructor-only: python judge/run.py s03_notebook.ipynb</a:t>
             </a:r>
           </a:p>
         </p:txBody>
@@ -8416,7 +8416,7 @@
                 </a:solidFill>
                 <a:latin typeface="Vazirmatn"/>
               </a:rPr>
-              <a:t>• B1 غافلگیریِ سه کیسه  2. B2 قهرمانِ جعبهٔ سبک  3. B3 قهرمانِ تایتانیک + نقشهٔ کشتی ⛴️</a:t>
+              <a:t>• B1 غافلگیریِ سه کیسه  2. B2 قهرمانِ جعبهٔ سبک  3. B3 قهرمانِ تایتانیک + نقشهٔ کشتی</a:t>
             </a:r>
           </a:p>
         </p:txBody>
@@ -8451,41 +8451,6 @@
                 </a:solidFill>
                 <a:latin typeface="Vazirmatn"/>
               </a:rPr>
-              <a:t>python judge/run.py s03_notebook.ipynb ← نمرهٔ فوری، هر وقت خواستی</a:t>
-            </a:r>
-          </a:p>
-        </p:txBody>
-      </p:sp>
-      <p:sp>
-        <p:nvSpPr>
-          <p:cNvPr id="6" name="TextBox 5"/>
-          <p:cNvSpPr txBox="1"/>
-          <p:nvPr/>
-        </p:nvSpPr>
-        <p:spPr>
-          <a:xfrm>
-            <a:off x="731520" y="2377440"/>
-            <a:ext cx="10728655" cy="640080"/>
-          </a:xfrm>
-          <a:prstGeom prst="rect">
-            <a:avLst/>
-          </a:prstGeom>
-          <a:noFill/>
-        </p:spPr>
-        <p:txBody>
-          <a:bodyPr wrap="square">
-            <a:spAutoFit/>
-          </a:bodyPr>
-          <a:lstStyle/>
-          <a:p>
-            <a:pPr algn="r" rtl="1"/>
-            <a:r>
-              <a:rPr sz="1800">
-                <a:solidFill>
-                  <a:srgbClr val="3C4043"/>
-                </a:solidFill>
-                <a:latin typeface="Vazirmatn"/>
-              </a:rPr>
               <a:t>«رأیِ جلسهٔ ۱‌ام، امروز عدد شد.» — سیُمین Ship ات</a:t>
             </a:r>
           </a:p>
@@ -8493,7 +8458,7 @@
       </p:sp>
       <p:pic>
         <p:nvPicPr>
-          <p:cNvPr id="7" name="Picture 6" descr="annotated_plot.png"/>
+          <p:cNvPr id="6" name="Picture 5" descr="annotated_plot.png"/>
           <p:cNvPicPr>
             <a:picLocks noChangeAspect="1"/>
           </p:cNvPicPr>
@@ -8517,7 +8482,7 @@
       </p:pic>
       <p:sp>
         <p:nvSpPr>
-          <p:cNvPr id="8" name="TextBox 7"/>
+          <p:cNvPr id="7" name="TextBox 6"/>
           <p:cNvSpPr txBox="1"/>
           <p:nvPr/>
         </p:nvSpPr>
